--- a/courses/build/teach-the-teachers/T-D2.zu.pptx
+++ b/courses/build/teach-the-teachers/T-D2.zu.pptx
@@ -5419,7 +5419,7 @@
                 </a:solidFill>
                 <a:latin typeface="Segoe Print"/>
               </a:rPr>
-              <a:t>Where does the water go?</a:t>
+              <a:t>Amanzi aya kuphi?</a:t>
             </a:r>
           </a:p>
         </p:txBody>
@@ -5496,13 +5496,13 @@
               </a:spcAft>
             </a:pPr>
             <a:r>
-              <a:rPr sz="3000" b="1">
+              <a:rPr sz="2600" b="1">
                 <a:solidFill>
                   <a:srgbClr val="1C1C1C"/>
                 </a:solidFill>
                 <a:latin typeface="Trebuchet MS"/>
               </a:rPr>
-              <a:t>•  Pour 500 ml on each bottle</a:t>
+              <a:t>•  Thelani 500 ml ebhodleleni ngalinye</a:t>
             </a:r>
           </a:p>
           <a:p>
@@ -5512,13 +5512,13 @@
               </a:spcAft>
             </a:pPr>
             <a:r>
-              <a:rPr sz="3000" b="1">
+              <a:rPr sz="2600" b="1">
                 <a:solidFill>
                   <a:srgbClr val="1C1C1C"/>
                 </a:solidFill>
                 <a:latin typeface="Trebuchet MS"/>
               </a:rPr>
-              <a:t>•  Catch and measure the runoff</a:t>
+              <a:t>•  Bambani nilinganise amanzi agelezayo</a:t>
             </a:r>
           </a:p>
           <a:p>
@@ -5528,13 +5528,13 @@
               </a:spcAft>
             </a:pPr>
             <a:r>
-              <a:rPr sz="3000" b="1">
+              <a:rPr sz="2600" b="1">
                 <a:solidFill>
                   <a:srgbClr val="1C1C1C"/>
                 </a:solidFill>
                 <a:latin typeface="Trebuchet MS"/>
               </a:rPr>
-              <a:t>•  Find three water signs</a:t>
+              <a:t>•  Tholani izimpawu ezintathu zamanzi</a:t>
             </a:r>
           </a:p>
         </p:txBody>
@@ -5784,7 +5784,7 @@
                 </a:solidFill>
                 <a:latin typeface="Segoe Print"/>
               </a:rPr>
-              <a:t>Tree talk</a:t>
+              <a:t>Ukufundisa ngaphansi kwesihlahla</a:t>
             </a:r>
           </a:p>
         </p:txBody>
@@ -5867,7 +5867,7 @@
                 </a:solidFill>
                 <a:latin typeface="Trebuchet MS"/>
               </a:rPr>
-              <a:t>•  Sun behind learners</a:t>
+              <a:t>•  Ilanga ngemuva kwabafundi</a:t>
             </a:r>
           </a:p>
           <a:p>
@@ -5883,7 +5883,7 @@
                 </a:solidFill>
                 <a:latin typeface="Trebuchet MS"/>
               </a:rPr>
-              <a:t>•  Poster at eye level</a:t>
+              <a:t>•  Iphosta ezingeni lamehlo</a:t>
             </a:r>
           </a:p>
           <a:p>
@@ -5899,7 +5899,7 @@
                 </a:solidFill>
                 <a:latin typeface="Trebuchet MS"/>
               </a:rPr>
-              <a:t>•  Stop, then talk</a:t>
+              <a:t>•  Yima, bese ukhuluma</a:t>
             </a:r>
           </a:p>
         </p:txBody>
@@ -6205,7 +6205,7 @@
                 </a:solidFill>
                 <a:latin typeface="Segoe Print"/>
               </a:rPr>
-              <a:t>Mode 1: posters only</a:t>
+              <a:t>Indlela 1: amaphosta kuphela</a:t>
             </a:r>
           </a:p>
         </p:txBody>
@@ -6288,7 +6288,7 @@
                 </a:solidFill>
                 <a:latin typeface="Trebuchet MS"/>
               </a:rPr>
-              <a:t>One lesson, three ways</a:t>
+              <a:t>Isifundo esisodwa, izindlela ezintathu</a:t>
             </a:r>
           </a:p>
           <a:p>
@@ -6304,7 +6304,7 @@
                 </a:solidFill>
                 <a:latin typeface="Trebuchet MS"/>
               </a:rPr>
-              <a:t>Today: the poster</a:t>
+              <a:t>Namuhla: iphosta</a:t>
             </a:r>
           </a:p>
         </p:txBody>
@@ -6610,7 +6610,7 @@
                 </a:solidFill>
                 <a:latin typeface="Segoe Print"/>
               </a:rPr>
-              <a:t>Teach from a poster</a:t>
+              <a:t>Fundisa ngephosta</a:t>
             </a:r>
           </a:p>
         </p:txBody>
@@ -6693,7 +6693,7 @@
                 </a:solidFill>
                 <a:latin typeface="Trebuchet MS"/>
               </a:rPr>
-              <a:t>•  Cover and reveal</a:t>
+              <a:t>•  Mboza bese uyambula</a:t>
             </a:r>
           </a:p>
           <a:p>
@@ -6709,7 +6709,7 @@
                 </a:solidFill>
                 <a:latin typeface="Trebuchet MS"/>
               </a:rPr>
-              <a:t>•  Point and ask</a:t>
+              <a:t>•  Khomba bese ubuza</a:t>
             </a:r>
           </a:p>
           <a:p>
@@ -6725,7 +6725,7 @@
                 </a:solidFill>
                 <a:latin typeface="Trebuchet MS"/>
               </a:rPr>
-              <a:t>•  Learners come to the poster</a:t>
+              <a:t>•  Abafundi beza ephosteni</a:t>
             </a:r>
           </a:p>
         </p:txBody>
@@ -7031,7 +7031,7 @@
                 </a:solidFill>
                 <a:latin typeface="Segoe Print"/>
               </a:rPr>
-              <a:t>Everyone learns</a:t>
+              <a:t>Wonke umuntu uyafunda</a:t>
             </a:r>
           </a:p>
         </p:txBody>
@@ -7108,13 +7108,13 @@
               </a:spcAft>
             </a:pPr>
             <a:r>
-              <a:rPr sz="2800" b="0">
+              <a:rPr sz="2400" b="0">
                 <a:solidFill>
                   <a:srgbClr val="1C1C1C"/>
                 </a:solidFill>
                 <a:latin typeface="Trebuchet MS"/>
               </a:rPr>
-              <a:t>•  Language time: retell it</a:t>
+              <a:t>•  Isikhathi solimi: bayaphinda bayixoxe</a:t>
             </a:r>
           </a:p>
           <a:p>
@@ -7124,13 +7124,13 @@
               </a:spcAft>
             </a:pPr>
             <a:r>
-              <a:rPr sz="2800" b="0">
+              <a:rPr sz="2400" b="0">
                 <a:solidFill>
                   <a:srgbClr val="1C1C1C"/>
                 </a:solidFill>
                 <a:latin typeface="Trebuchet MS"/>
               </a:rPr>
-              <a:t>•  A role for everyone</a:t>
+              <a:t>•  Umsebenzi womuntu wonke</a:t>
             </a:r>
           </a:p>
           <a:p>
@@ -7140,13 +7140,13 @@
               </a:spcAft>
             </a:pPr>
             <a:r>
-              <a:rPr sz="2800" b="0">
+              <a:rPr sz="2400" b="0">
                 <a:solidFill>
                   <a:srgbClr val="1C1C1C"/>
                 </a:solidFill>
                 <a:latin typeface="Trebuchet MS"/>
               </a:rPr>
-              <a:t>•  Seated jobs, picture labels</a:t>
+              <a:t>•  Imisebenzi yokuhlala phansi, amalebula ezithombe</a:t>
             </a:r>
           </a:p>
         </p:txBody>
@@ -7535,7 +7535,7 @@
                 </a:solidFill>
                 <a:latin typeface="Segoe Print"/>
               </a:rPr>
-              <a:t>Micro-teaching Round 2</a:t>
+              <a:t>Ukufundisa okuncane: Round 2</a:t>
             </a:r>
           </a:p>
         </p:txBody>
@@ -7618,7 +7618,7 @@
                 </a:solidFill>
                 <a:latin typeface="Trebuchet MS"/>
               </a:rPr>
-              <a:t>•  10 minutes, solo, posters only</a:t>
+              <a:t>•  Imizuzu 10, uwedwa, amaphosta kuphela</a:t>
             </a:r>
           </a:p>
           <a:p>
@@ -7634,7 +7634,7 @@
                 </a:solidFill>
                 <a:latin typeface="Trebuchet MS"/>
               </a:rPr>
-              <a:t>•  Observer counts talk and questions</a:t>
+              <a:t>•  Umbukeli ubala ukukhuluma nemibuzo</a:t>
             </a:r>
           </a:p>
           <a:p>
@@ -7650,7 +7650,7 @@
                 </a:solidFill>
                 <a:latin typeface="Trebuchet MS"/>
               </a:rPr>
-              <a:t>•  6 minutes feedback</a:t>
+              <a:t>•  Imizuzu 6 yempendulo</a:t>
             </a:r>
           </a:p>
         </p:txBody>
@@ -7956,7 +7956,7 @@
                 </a:solidFill>
                 <a:latin typeface="Segoe Print"/>
               </a:rPr>
-              <a:t>The talk scoreboard</a:t>
+              <a:t>Ibhodi lokukhuluma</a:t>
             </a:r>
           </a:p>
         </p:txBody>
@@ -8033,13 +8033,13 @@
               </a:spcAft>
             </a:pPr>
             <a:r>
-              <a:rPr sz="2800" b="0">
+              <a:rPr sz="2400" b="0">
                 <a:solidFill>
                   <a:srgbClr val="1C1C1C"/>
                 </a:solidFill>
                 <a:latin typeface="Trebuchet MS"/>
               </a:rPr>
-              <a:t>•  Write your own talk %</a:t>
+              <a:t>•  Bhala i-% yakho yokukhuluma</a:t>
             </a:r>
           </a:p>
           <a:p>
@@ -8049,13 +8049,13 @@
               </a:spcAft>
             </a:pPr>
             <a:r>
-              <a:rPr sz="2800" b="0">
+              <a:rPr sz="2400" b="0">
                 <a:solidFill>
                   <a:srgbClr val="1C1C1C"/>
                 </a:solidFill>
                 <a:latin typeface="Trebuchet MS"/>
               </a:rPr>
-              <a:t>•  What helped you talk less?</a:t>
+              <a:t>•  Yini ekusizile ukuthi ukhulume kancane?</a:t>
             </a:r>
           </a:p>
         </p:txBody>
@@ -8361,7 +8361,7 @@
                 </a:solidFill>
                 <a:latin typeface="Segoe Print"/>
               </a:rPr>
-              <a:t>Course craft: POPIA</a:t>
+              <a:t>Ubuciko besifundo: i-POPIA</a:t>
             </a:r>
           </a:p>
         </p:txBody>
@@ -8438,13 +8438,13 @@
               </a:spcAft>
             </a:pPr>
             <a:r>
-              <a:rPr sz="2800" b="0">
+              <a:rPr sz="2400" b="0">
                 <a:solidFill>
                   <a:srgbClr val="1C1C1C"/>
                 </a:solidFill>
                 <a:latin typeface="Trebuchet MS"/>
               </a:rPr>
-              <a:t>•  Consent before the camera</a:t>
+              <a:t>•  Imvume ngaphambi kwekhamera</a:t>
             </a:r>
           </a:p>
           <a:p>
@@ -8454,13 +8454,13 @@
               </a:spcAft>
             </a:pPr>
             <a:r>
-              <a:rPr sz="2800" b="0">
+              <a:rPr sz="2400" b="0">
                 <a:solidFill>
                   <a:srgbClr val="1C1C1C"/>
                 </a:solidFill>
                 <a:latin typeface="Trebuchet MS"/>
               </a:rPr>
-              <a:t>•  Green dot = no photos</a:t>
+              <a:t>•  Ichashaza eliluhlaza = azikho izithombe</a:t>
             </a:r>
           </a:p>
           <a:p>
@@ -8470,13 +8470,13 @@
               </a:spcAft>
             </a:pPr>
             <a:r>
-              <a:rPr sz="2800" b="0">
+              <a:rPr sz="2400" b="0">
                 <a:solidFill>
                   <a:srgbClr val="1C1C1C"/>
                 </a:solidFill>
                 <a:latin typeface="Trebuchet MS"/>
               </a:rPr>
-              <a:t>•  Share only what was agreed</a:t>
+              <a:t>•  Yabelana ngalokho okuvunyelwene ngakho kuphela</a:t>
             </a:r>
           </a:p>
         </p:txBody>
@@ -11303,7 +11303,7 @@
                 </a:solidFill>
                 <a:latin typeface="Segoe Print"/>
               </a:rPr>
-              <a:t>Model lesson under a tree</a:t>
+              <a:t>Isifundo esiyisibonelo ngaphansi kwesihlahla</a:t>
             </a:r>
           </a:p>
         </p:txBody>
@@ -11386,7 +11386,7 @@
                 </a:solidFill>
                 <a:latin typeface="Trebuchet MS"/>
               </a:rPr>
-              <a:t>Read the land and water</a:t>
+              <a:t>Funda umhlaba namanzi</a:t>
             </a:r>
           </a:p>
           <a:p>
@@ -11402,7 +11402,7 @@
                 </a:solidFill>
                 <a:latin typeface="Trebuchet MS"/>
               </a:rPr>
-              <a:t>Recorders: count question types</a:t>
+              <a:t>Ababhali: balani izinhlobo zemibuzo</a:t>
             </a:r>
           </a:p>
         </p:txBody>
@@ -11791,7 +11791,7 @@
                 </a:solidFill>
                 <a:latin typeface="Segoe Print"/>
               </a:rPr>
-              <a:t>Where is the sun?</a:t>
+              <a:t>Ilanga likuphi?</a:t>
             </a:r>
           </a:p>
         </p:txBody>
@@ -11874,7 +11874,7 @@
                 </a:solidFill>
                 <a:latin typeface="Trebuchet MS"/>
               </a:rPr>
-              <a:t>•  Window faces north</a:t>
+              <a:t>•  Iwindi libheke enyakatho</a:t>
             </a:r>
           </a:p>
           <a:p>
@@ -11890,7 +11890,7 @@
                 </a:solidFill>
                 <a:latin typeface="Trebuchet MS"/>
               </a:rPr>
-              <a:t>•  Mark winter shade with sticks</a:t>
+              <a:t>•  Makani umthunzi wasebusika ngezinduku</a:t>
             </a:r>
           </a:p>
           <a:p>
@@ -11906,7 +11906,7 @@
                 </a:solidFill>
                 <a:latin typeface="Trebuchet MS"/>
               </a:rPr>
-              <a:t>•  Which way does the shadow point?</a:t>
+              <a:t>•  Isithunzi sikhomba ngaphi?</a:t>
             </a:r>
           </a:p>
         </p:txBody>

--- a/courses/build/teach-the-teachers/T-D2.zu.pptx
+++ b/courses/build/teach-the-teachers/T-D2.zu.pptx
@@ -615,7 +615,7 @@
           </a:p>
           <a:p>
             <a:r>
-              <a:t>Clip T-ANI-14: public/course-animations/reading-landscape/watch-05-water-movement.mp4</a:t>
+              <a:t>Clip T-ANI-14: public/course-media/teach-the-teachers/T-ANI-14.mp4</a:t>
             </a:r>
           </a:p>
         </p:txBody>
@@ -1481,7 +1481,7 @@
           </a:p>
           <a:p>
             <a:r>
-              <a:t>Clip T-ANI-17: public/course-animations/soil-health/watch-05-living-soil.mp4</a:t>
+              <a:t>Clip T-ANI-17: public/course-media/teach-the-teachers/T-ANI-17.mp4</a:t>
             </a:r>
           </a:p>
         </p:txBody>
@@ -1805,7 +1805,7 @@
           </a:p>
           <a:p>
             <a:r>
-              <a:t>Clip T-ANI-13: public/course-animations/reading-landscape/watch-09-sun-shadows.mp4</a:t>
+              <a:t>Clip T-ANI-13: public/course-media/teach-the-teachers/T-ANI-13.mp4</a:t>
             </a:r>
           </a:p>
         </p:txBody>
@@ -5539,49 +5539,27 @@
           </a:p>
         </p:txBody>
       </p:sp>
-      <p:pic>
-        <p:nvPicPr>
-          <p:cNvPr id="9" name="Picture 8" descr="watch-05-water-movement.jpg"/>
-          <p:cNvPicPr>
-            <a:picLocks noChangeAspect="1"/>
-          </p:cNvPicPr>
-          <p:nvPr/>
-        </p:nvPicPr>
-        <p:blipFill>
-          <a:blip r:embed="rId2"/>
-          <a:stretch>
-            <a:fillRect/>
-          </a:stretch>
-        </p:blipFill>
-        <p:spPr>
-          <a:xfrm>
-            <a:off x="5852160" y="2514600"/>
-            <a:ext cx="5852160" cy="3291840"/>
-          </a:xfrm>
-          <a:prstGeom prst="rect">
-            <a:avLst/>
-          </a:prstGeom>
-        </p:spPr>
-      </p:pic>
-      <p:sp>
-        <p:nvSpPr>
-          <p:cNvPr id="10" name="Rectangle 9"/>
+      <p:sp>
+        <p:nvSpPr>
+          <p:cNvPr id="9" name="Rectangle 8"/>
           <p:cNvSpPr/>
           <p:nvPr/>
         </p:nvSpPr>
         <p:spPr>
           <a:xfrm>
-            <a:off x="5852160" y="5806440"/>
-            <a:ext cx="5852160" cy="411480"/>
+            <a:off x="5852160" y="2103120"/>
+            <a:ext cx="5852160" cy="4114800"/>
           </a:xfrm>
           <a:prstGeom prst="rect">
             <a:avLst/>
           </a:prstGeom>
           <a:solidFill>
-            <a:srgbClr val="1C1C1C"/>
+            <a:srgbClr val="C9A77C"/>
           </a:solidFill>
-          <a:ln>
-            <a:noFill/>
+          <a:ln w="15875">
+            <a:solidFill>
+              <a:srgbClr val="2C6FB7"/>
+            </a:solidFill>
           </a:ln>
           <a:effectLst/>
         </p:spPr>
@@ -5609,14 +5587,53 @@
       </p:sp>
       <p:sp>
         <p:nvSpPr>
+          <p:cNvPr id="10" name="TextBox 9"/>
+          <p:cNvSpPr txBox="1"/>
+          <p:nvPr/>
+        </p:nvSpPr>
+        <p:spPr>
+          <a:xfrm>
+            <a:off x="6080760" y="2286000"/>
+            <a:ext cx="5394960" cy="365760"/>
+          </a:xfrm>
+          <a:prstGeom prst="rect">
+            <a:avLst/>
+          </a:prstGeom>
+          <a:noFill/>
+        </p:spPr>
+        <p:txBody>
+          <a:bodyPr wrap="square" anchor="t" lIns="45720" rIns="45720">
+            <a:spAutoFit/>
+          </a:bodyPr>
+          <a:lstStyle/>
+          <a:p>
+            <a:pPr algn="l">
+              <a:spcAft>
+                <a:spcPts val="800"/>
+              </a:spcAft>
+            </a:pPr>
+            <a:r>
+              <a:rPr sz="1200" b="1">
+                <a:solidFill>
+                  <a:srgbClr val="D2452C"/>
+                </a:solidFill>
+                <a:latin typeface="Trebuchet MS"/>
+              </a:rPr>
+              <a:t>ANIMATION · T-ANI-14 · coming</a:t>
+            </a:r>
+          </a:p>
+        </p:txBody>
+      </p:sp>
+      <p:sp>
+        <p:nvSpPr>
           <p:cNvPr id="11" name="TextBox 10"/>
           <p:cNvSpPr txBox="1"/>
           <p:nvPr/>
         </p:nvSpPr>
         <p:spPr>
           <a:xfrm>
-            <a:off x="5943600" y="5815584"/>
-            <a:ext cx="5669280" cy="384048"/>
+            <a:off x="6080760" y="2670048"/>
+            <a:ext cx="5394960" cy="457200"/>
           </a:xfrm>
           <a:prstGeom prst="rect">
             <a:avLst/>
@@ -5624,7 +5641,7 @@
           <a:noFill/>
         </p:spPr>
         <p:txBody>
-          <a:bodyPr wrap="square" anchor="ctr" lIns="45720" rIns="45720">
+          <a:bodyPr wrap="square" anchor="t" lIns="45720" rIns="45720">
             <a:spAutoFit/>
           </a:bodyPr>
           <a:lstStyle/>
@@ -5635,13 +5652,52 @@
               </a:spcAft>
             </a:pPr>
             <a:r>
+              <a:rPr sz="1800" b="1">
+                <a:solidFill>
+                  <a:srgbClr val="1C1C1C"/>
+                </a:solidFill>
+                <a:latin typeface="Segoe Print"/>
+              </a:rPr>
+              <a:t>Water movement</a:t>
+            </a:r>
+          </a:p>
+        </p:txBody>
+      </p:sp>
+      <p:sp>
+        <p:nvSpPr>
+          <p:cNvPr id="12" name="TextBox 11"/>
+          <p:cNvSpPr txBox="1"/>
+          <p:nvPr/>
+        </p:nvSpPr>
+        <p:spPr>
+          <a:xfrm>
+            <a:off x="6080760" y="3200400"/>
+            <a:ext cx="5394960" cy="2834640"/>
+          </a:xfrm>
+          <a:prstGeom prst="rect">
+            <a:avLst/>
+          </a:prstGeom>
+          <a:noFill/>
+        </p:spPr>
+        <p:txBody>
+          <a:bodyPr wrap="square" anchor="t" lIns="45720" rIns="45720">
+            <a:spAutoFit/>
+          </a:bodyPr>
+          <a:lstStyle/>
+          <a:p>
+            <a:pPr algn="l">
+              <a:spcAft>
+                <a:spcPts val="800"/>
+              </a:spcAft>
+            </a:pPr>
+            <a:r>
               <a:rPr sz="1100" b="0">
                 <a:solidFill>
-                  <a:srgbClr val="C9A77C"/>
+                  <a:srgbClr val="1C1C1C"/>
                 </a:solidFill>
                 <a:latin typeface="Trebuchet MS"/>
               </a:rPr>
-              <a:t>▶  Clip T-ANI-14 · play from the tablet: watch-05-water-movement.mp4</a:t>
+              <a:t>A homestead on a gentle slope in a summer storm: rain falls on roof, road and yard; blue flow lines gather into channels and run downhill carrying soil. Then the same slope with stone lines and grass strips, where the water spreads and sinks in. (Replaces the withdrawn clip `reading-landscape/watch-05-water-movement.mp4`.)</a:t>
             </a:r>
           </a:p>
         </p:txBody>
@@ -10133,49 +10189,27 @@
           </a:p>
         </p:txBody>
       </p:sp>
-      <p:pic>
-        <p:nvPicPr>
-          <p:cNvPr id="7" name="Picture 6" descr="watch-05-living-soil.jpg"/>
-          <p:cNvPicPr>
-            <a:picLocks noChangeAspect="1"/>
-          </p:cNvPicPr>
-          <p:nvPr/>
-        </p:nvPicPr>
-        <p:blipFill>
-          <a:blip r:embed="rId2"/>
-          <a:stretch>
-            <a:fillRect/>
-          </a:stretch>
-        </p:blipFill>
-        <p:spPr>
-          <a:xfrm>
-            <a:off x="5852160" y="2308860"/>
-            <a:ext cx="5852160" cy="3291840"/>
-          </a:xfrm>
-          <a:prstGeom prst="rect">
-            <a:avLst/>
-          </a:prstGeom>
-        </p:spPr>
-      </p:pic>
-      <p:sp>
-        <p:nvSpPr>
-          <p:cNvPr id="8" name="Rectangle 7"/>
+      <p:sp>
+        <p:nvSpPr>
+          <p:cNvPr id="7" name="Rectangle 6"/>
           <p:cNvSpPr/>
           <p:nvPr/>
         </p:nvSpPr>
         <p:spPr>
           <a:xfrm>
-            <a:off x="5852160" y="5806440"/>
-            <a:ext cx="5852160" cy="411480"/>
+            <a:off x="5852160" y="1691640"/>
+            <a:ext cx="5852160" cy="4526280"/>
           </a:xfrm>
           <a:prstGeom prst="rect">
             <a:avLst/>
           </a:prstGeom>
           <a:solidFill>
-            <a:srgbClr val="1C1C1C"/>
+            <a:srgbClr val="C9A77C"/>
           </a:solidFill>
-          <a:ln>
-            <a:noFill/>
+          <a:ln w="15875">
+            <a:solidFill>
+              <a:srgbClr val="2C6FB7"/>
+            </a:solidFill>
           </a:ln>
           <a:effectLst/>
         </p:spPr>
@@ -10203,14 +10237,53 @@
       </p:sp>
       <p:sp>
         <p:nvSpPr>
+          <p:cNvPr id="8" name="TextBox 7"/>
+          <p:cNvSpPr txBox="1"/>
+          <p:nvPr/>
+        </p:nvSpPr>
+        <p:spPr>
+          <a:xfrm>
+            <a:off x="6080760" y="1874520"/>
+            <a:ext cx="5394960" cy="365760"/>
+          </a:xfrm>
+          <a:prstGeom prst="rect">
+            <a:avLst/>
+          </a:prstGeom>
+          <a:noFill/>
+        </p:spPr>
+        <p:txBody>
+          <a:bodyPr wrap="square" anchor="t" lIns="45720" rIns="45720">
+            <a:spAutoFit/>
+          </a:bodyPr>
+          <a:lstStyle/>
+          <a:p>
+            <a:pPr algn="l">
+              <a:spcAft>
+                <a:spcPts val="800"/>
+              </a:spcAft>
+            </a:pPr>
+            <a:r>
+              <a:rPr sz="1200" b="1">
+                <a:solidFill>
+                  <a:srgbClr val="D2452C"/>
+                </a:solidFill>
+                <a:latin typeface="Trebuchet MS"/>
+              </a:rPr>
+              <a:t>ANIMATION · T-ANI-17 · coming</a:t>
+            </a:r>
+          </a:p>
+        </p:txBody>
+      </p:sp>
+      <p:sp>
+        <p:nvSpPr>
           <p:cNvPr id="9" name="TextBox 8"/>
           <p:cNvSpPr txBox="1"/>
           <p:nvPr/>
         </p:nvSpPr>
         <p:spPr>
           <a:xfrm>
-            <a:off x="5943600" y="5815584"/>
-            <a:ext cx="5669280" cy="384048"/>
+            <a:off x="6080760" y="2258568"/>
+            <a:ext cx="5394960" cy="457200"/>
           </a:xfrm>
           <a:prstGeom prst="rect">
             <a:avLst/>
@@ -10218,7 +10291,7 @@
           <a:noFill/>
         </p:spPr>
         <p:txBody>
-          <a:bodyPr wrap="square" anchor="ctr" lIns="45720" rIns="45720">
+          <a:bodyPr wrap="square" anchor="t" lIns="45720" rIns="45720">
             <a:spAutoFit/>
           </a:bodyPr>
           <a:lstStyle/>
@@ -10229,13 +10302,52 @@
               </a:spcAft>
             </a:pPr>
             <a:r>
+              <a:rPr sz="1800" b="1">
+                <a:solidFill>
+                  <a:srgbClr val="1C1C1C"/>
+                </a:solidFill>
+                <a:latin typeface="Segoe Print"/>
+              </a:rPr>
+              <a:t>Living soil</a:t>
+            </a:r>
+          </a:p>
+        </p:txBody>
+      </p:sp>
+      <p:sp>
+        <p:nvSpPr>
+          <p:cNvPr id="10" name="TextBox 9"/>
+          <p:cNvSpPr txBox="1"/>
+          <p:nvPr/>
+        </p:nvSpPr>
+        <p:spPr>
+          <a:xfrm>
+            <a:off x="6080760" y="2788920"/>
+            <a:ext cx="5394960" cy="3246120"/>
+          </a:xfrm>
+          <a:prstGeom prst="rect">
+            <a:avLst/>
+          </a:prstGeom>
+          <a:noFill/>
+        </p:spPr>
+        <p:txBody>
+          <a:bodyPr wrap="square" anchor="t" lIns="45720" rIns="45720">
+            <a:spAutoFit/>
+          </a:bodyPr>
+          <a:lstStyle/>
+          <a:p>
+            <a:pPr algn="l">
+              <a:spcAft>
+                <a:spcPts val="800"/>
+              </a:spcAft>
+            </a:pPr>
+            <a:r>
               <a:rPr sz="1100" b="0">
                 <a:solidFill>
-                  <a:srgbClr val="C9A77C"/>
+                  <a:srgbClr val="1C1C1C"/>
                 </a:solidFill>
                 <a:latin typeface="Trebuchet MS"/>
               </a:rPr>
-              <a:t>▶  Clip T-ANI-17 · play from the tablet: watch-05-living-soil.mp4</a:t>
+              <a:t>Cut-away of dark garden soil under mulch, magnified: earthworms tunnel, fungus threads link roots, tiny specks of life move, crumbs hold air and water droplets; a fallen leaf above is slowly broken down and pulled into the soil. (Replaces the withdrawn clip `soil-health/watch-05-living-soil.mp4`.)</a:t>
             </a:r>
           </a:p>
         </p:txBody>
